--- a/proposals/機種分析/虚構推理/kyokosuiri_guide_v2.pptx
+++ b/proposals/機種分析/虚構推理/kyokosuiri_guide_v2.pptx
@@ -3468,7 +3468,7 @@
         <p:spPr>
           <a:xfrm>
             <a:off x="5166360" y="256032"/>
-            <a:ext cx="3749039" cy="1430000"/>
+            <a:ext cx="3749039" cy="1280000"/>
           </a:xfrm>
           <a:prstGeom prst="rect">
             <a:avLst/>
@@ -3513,7 +3513,7 @@
         <p:spPr>
           <a:xfrm>
             <a:off x="5166360" y="256032"/>
-            <a:ext cx="60000" cy="1430000"/>
+            <a:ext cx="60000" cy="1280000"/>
           </a:xfrm>
           <a:prstGeom prst="rect">
             <a:avLst/>
@@ -3556,7 +3556,7 @@
         <p:spPr>
           <a:xfrm>
             <a:off x="5349240" y="316032"/>
-            <a:ext cx="3474720" cy="300000"/>
+            <a:ext cx="3474720" cy="280000"/>
           </a:xfrm>
           <a:prstGeom prst="rect">
             <a:avLst/>
@@ -3590,8 +3590,8 @@
         </p:nvSpPr>
         <p:spPr>
           <a:xfrm>
-            <a:off x="5349240" y="616032"/>
-            <a:ext cx="3474720" cy="900000"/>
+            <a:off x="5349240" y="596032"/>
+            <a:ext cx="3474720" cy="800000"/>
           </a:xfrm>
           <a:prstGeom prst="rect">
             <a:avLst/>
@@ -3626,8 +3626,8 @@
         </p:nvSpPr>
         <p:spPr>
           <a:xfrm>
-            <a:off x="5166360" y="1786032"/>
-            <a:ext cx="3749039" cy="1430000"/>
+            <a:off x="5166360" y="1627632"/>
+            <a:ext cx="3749039" cy="1280000"/>
           </a:xfrm>
           <a:prstGeom prst="rect">
             <a:avLst/>
@@ -3671,8 +3671,8 @@
         </p:nvSpPr>
         <p:spPr>
           <a:xfrm>
-            <a:off x="5166360" y="1786032"/>
-            <a:ext cx="60000" cy="1430000"/>
+            <a:off x="5166360" y="1627632"/>
+            <a:ext cx="60000" cy="1280000"/>
           </a:xfrm>
           <a:prstGeom prst="rect">
             <a:avLst/>
@@ -3714,8 +3714,8 @@
         </p:nvSpPr>
         <p:spPr>
           <a:xfrm>
-            <a:off x="5349240" y="1846032"/>
-            <a:ext cx="3474720" cy="300000"/>
+            <a:off x="5349240" y="1687632"/>
+            <a:ext cx="3474720" cy="280000"/>
           </a:xfrm>
           <a:prstGeom prst="rect">
             <a:avLst/>
@@ -3749,8 +3749,8 @@
         </p:nvSpPr>
         <p:spPr>
           <a:xfrm>
-            <a:off x="5349240" y="2146032"/>
-            <a:ext cx="3474720" cy="900000"/>
+            <a:off x="5349240" y="1967632"/>
+            <a:ext cx="3474720" cy="800000"/>
           </a:xfrm>
           <a:prstGeom prst="rect">
             <a:avLst/>
@@ -3785,8 +3785,8 @@
         </p:nvSpPr>
         <p:spPr>
           <a:xfrm>
-            <a:off x="5166360" y="3316032"/>
-            <a:ext cx="3749039" cy="1430000"/>
+            <a:off x="5166360" y="2999232"/>
+            <a:ext cx="3749039" cy="1280000"/>
           </a:xfrm>
           <a:prstGeom prst="rect">
             <a:avLst/>
@@ -3830,8 +3830,8 @@
         </p:nvSpPr>
         <p:spPr>
           <a:xfrm>
-            <a:off x="5166360" y="3316032"/>
-            <a:ext cx="60000" cy="1430000"/>
+            <a:off x="5166360" y="2999232"/>
+            <a:ext cx="60000" cy="1280000"/>
           </a:xfrm>
           <a:prstGeom prst="rect">
             <a:avLst/>
@@ -3873,8 +3873,8 @@
         </p:nvSpPr>
         <p:spPr>
           <a:xfrm>
-            <a:off x="5349240" y="3376032"/>
-            <a:ext cx="3474720" cy="300000"/>
+            <a:off x="5349240" y="3059232"/>
+            <a:ext cx="3474720" cy="280000"/>
           </a:xfrm>
           <a:prstGeom prst="rect">
             <a:avLst/>
@@ -3908,8 +3908,8 @@
         </p:nvSpPr>
         <p:spPr>
           <a:xfrm>
-            <a:off x="5349240" y="3676032"/>
-            <a:ext cx="3474720" cy="900000"/>
+            <a:off x="5349240" y="3339232"/>
+            <a:ext cx="3474720" cy="800000"/>
           </a:xfrm>
           <a:prstGeom prst="rect">
             <a:avLst/>
